--- a/class/cloud_infra_mgmt/02주차_Docker기초/01_강의자료/1차시_컨테이너명령어심화.pptx
+++ b/class/cloud_infra_mgmt/02주차_Docker기초/01_강의자료/1차시_컨테이너명령어심화.pptx
@@ -8018,7 +8018,7 @@
               </a:lnSpc>
             </a:pPr>
             <a:r>
-              <a:rPr sz="1500" b="1">
+              <a:rPr sz="1700" b="1">
                 <a:solidFill>
                   <a:srgbClr val="0D9488"/>
                 </a:solidFill>
@@ -8027,7 +8027,7 @@
               <a:t>●  </a:t>
             </a:r>
             <a:r>
-              <a:rPr sz="1500" b="0">
+              <a:rPr sz="1700" b="0">
                 <a:solidFill>
                   <a:srgbClr val="222733"/>
                 </a:solidFill>
@@ -8043,7 +8043,7 @@
               </a:lnSpc>
             </a:pPr>
             <a:r>
-              <a:rPr sz="1500" b="1">
+              <a:rPr sz="1700" b="1">
                 <a:solidFill>
                   <a:srgbClr val="0D9488"/>
                 </a:solidFill>
@@ -8052,7 +8052,7 @@
               <a:t>●  </a:t>
             </a:r>
             <a:r>
-              <a:rPr sz="1500" b="0">
+              <a:rPr sz="1700" b="0">
                 <a:solidFill>
                   <a:srgbClr val="222733"/>
                 </a:solidFill>
@@ -8068,7 +8068,7 @@
               </a:lnSpc>
             </a:pPr>
             <a:r>
-              <a:rPr sz="1500" b="1">
+              <a:rPr sz="1700" b="1">
                 <a:solidFill>
                   <a:srgbClr val="0D9488"/>
                 </a:solidFill>
@@ -8077,7 +8077,7 @@
               <a:t>●  </a:t>
             </a:r>
             <a:r>
-              <a:rPr sz="1500" b="0">
+              <a:rPr sz="1700" b="0">
                 <a:solidFill>
                   <a:srgbClr val="222733"/>
                 </a:solidFill>
@@ -8093,7 +8093,7 @@
               </a:lnSpc>
             </a:pPr>
             <a:r>
-              <a:rPr sz="1500" b="1">
+              <a:rPr sz="1700" b="1">
                 <a:solidFill>
                   <a:srgbClr val="0D9488"/>
                 </a:solidFill>
@@ -8102,7 +8102,7 @@
               <a:t>●  </a:t>
             </a:r>
             <a:r>
-              <a:rPr sz="1500" b="0">
+              <a:rPr sz="1700" b="0">
                 <a:solidFill>
                   <a:srgbClr val="222733"/>
                 </a:solidFill>
@@ -8118,7 +8118,7 @@
               </a:lnSpc>
             </a:pPr>
             <a:r>
-              <a:rPr sz="1500" b="1">
+              <a:rPr sz="1700" b="1">
                 <a:solidFill>
                   <a:srgbClr val="0D9488"/>
                 </a:solidFill>
@@ -8127,7 +8127,7 @@
               <a:t>●  </a:t>
             </a:r>
             <a:r>
-              <a:rPr sz="1500" b="0">
+              <a:rPr sz="1700" b="0">
                 <a:solidFill>
                   <a:srgbClr val="222733"/>
                 </a:solidFill>

--- a/class/cloud_infra_mgmt/02주차_Docker기초/01_강의자료/1차시_컨테이너명령어심화.pptx
+++ b/class/cloud_infra_mgmt/02주차_Docker기초/01_강의자료/1차시_컨테이너명령어심화.pptx
@@ -5097,7 +5097,7 @@
           <a:p>
             <a:pPr>
               <a:lnSpc>
-                <a:spcPct val="115000"/>
+                <a:spcPct val="149500"/>
               </a:lnSpc>
             </a:pPr>
             <a:r>
@@ -5122,7 +5122,7 @@
           <a:p>
             <a:pPr>
               <a:lnSpc>
-                <a:spcPct val="115000"/>
+                <a:spcPct val="149500"/>
               </a:lnSpc>
             </a:pPr>
             <a:r>
@@ -5147,7 +5147,7 @@
           <a:p>
             <a:pPr>
               <a:lnSpc>
-                <a:spcPct val="115000"/>
+                <a:spcPct val="149500"/>
               </a:lnSpc>
             </a:pPr>
             <a:r>
@@ -6396,16 +6396,104 @@
       </p:sp>
       <p:sp>
         <p:nvSpPr>
-          <p:cNvPr id="7" name="Isosceles Triangle 6"/>
+          <p:cNvPr id="7" name="Rectangle 6"/>
           <p:cNvSpPr/>
           <p:nvPr/>
         </p:nvSpPr>
         <p:spPr>
-          <a:xfrm rot="5400000">
-            <a:off x="3495751" y="1673352"/>
-            <a:ext cx="146304" cy="146304"/>
-          </a:xfrm>
-          <a:prstGeom prst="triangle">
+          <a:xfrm>
+            <a:off x="5096865" y="1730959"/>
+            <a:ext cx="1995220" cy="31089"/>
+          </a:xfrm>
+          <a:prstGeom prst="rect">
+            <a:avLst/>
+          </a:prstGeom>
+          <a:solidFill>
+            <a:srgbClr val="14B8A6"/>
+          </a:solidFill>
+          <a:ln>
+            <a:noFill/>
+          </a:ln>
+          <a:effectLst/>
+        </p:spPr>
+        <p:style>
+          <a:lnRef idx="1">
+            <a:schemeClr val="accent1"/>
+          </a:lnRef>
+          <a:fillRef idx="3">
+            <a:schemeClr val="accent1"/>
+          </a:fillRef>
+          <a:effectRef idx="2">
+            <a:schemeClr val="accent1"/>
+          </a:effectRef>
+          <a:fontRef idx="minor">
+            <a:schemeClr val="lt1"/>
+          </a:fontRef>
+        </p:style>
+        <p:txBody>
+          <a:bodyPr rtlCol="0" anchor="ctr"/>
+          <a:lstStyle/>
+          <a:p>
+            <a:pPr algn="ctr"/>
+          </a:p>
+        </p:txBody>
+      </p:sp>
+      <p:sp>
+        <p:nvSpPr>
+          <p:cNvPr id="8" name="Rectangle 7"/>
+          <p:cNvSpPr/>
+          <p:nvPr/>
+        </p:nvSpPr>
+        <p:spPr>
+          <a:xfrm>
+            <a:off x="7622438" y="1730959"/>
+            <a:ext cx="1995220" cy="31089"/>
+          </a:xfrm>
+          <a:prstGeom prst="rect">
+            <a:avLst/>
+          </a:prstGeom>
+          <a:solidFill>
+            <a:srgbClr val="14B8A6"/>
+          </a:solidFill>
+          <a:ln>
+            <a:noFill/>
+          </a:ln>
+          <a:effectLst/>
+        </p:spPr>
+        <p:style>
+          <a:lnRef idx="1">
+            <a:schemeClr val="accent1"/>
+          </a:lnRef>
+          <a:fillRef idx="3">
+            <a:schemeClr val="accent1"/>
+          </a:fillRef>
+          <a:effectRef idx="2">
+            <a:schemeClr val="accent1"/>
+          </a:effectRef>
+          <a:fontRef idx="minor">
+            <a:schemeClr val="lt1"/>
+          </a:fontRef>
+        </p:style>
+        <p:txBody>
+          <a:bodyPr rtlCol="0" anchor="ctr"/>
+          <a:lstStyle/>
+          <a:p>
+            <a:pPr algn="ctr"/>
+          </a:p>
+        </p:txBody>
+      </p:sp>
+      <p:sp>
+        <p:nvSpPr>
+          <p:cNvPr id="9" name="Oval 8"/>
+          <p:cNvSpPr/>
+          <p:nvPr/>
+        </p:nvSpPr>
+        <p:spPr>
+          <a:xfrm>
+            <a:off x="2040940" y="1481328"/>
+            <a:ext cx="530352" cy="530352"/>
+          </a:xfrm>
+          <a:prstGeom prst="ellipse">
             <a:avLst/>
           </a:prstGeom>
           <a:solidFill>
@@ -6440,227 +6528,7 @@
       </p:sp>
       <p:sp>
         <p:nvSpPr>
-          <p:cNvPr id="8" name="Rectangle 7"/>
-          <p:cNvSpPr/>
-          <p:nvPr/>
-        </p:nvSpPr>
-        <p:spPr>
-          <a:xfrm>
-            <a:off x="5096865" y="1730959"/>
-            <a:ext cx="1995220" cy="31089"/>
-          </a:xfrm>
-          <a:prstGeom prst="rect">
-            <a:avLst/>
-          </a:prstGeom>
-          <a:solidFill>
-            <a:srgbClr val="14B8A6"/>
-          </a:solidFill>
-          <a:ln>
-            <a:noFill/>
-          </a:ln>
-          <a:effectLst/>
-        </p:spPr>
-        <p:style>
-          <a:lnRef idx="1">
-            <a:schemeClr val="accent1"/>
-          </a:lnRef>
-          <a:fillRef idx="3">
-            <a:schemeClr val="accent1"/>
-          </a:fillRef>
-          <a:effectRef idx="2">
-            <a:schemeClr val="accent1"/>
-          </a:effectRef>
-          <a:fontRef idx="minor">
-            <a:schemeClr val="lt1"/>
-          </a:fontRef>
-        </p:style>
-        <p:txBody>
-          <a:bodyPr rtlCol="0" anchor="ctr"/>
-          <a:lstStyle/>
-          <a:p>
-            <a:pPr algn="ctr"/>
-          </a:p>
-        </p:txBody>
-      </p:sp>
-      <p:sp>
-        <p:nvSpPr>
-          <p:cNvPr id="9" name="Isosceles Triangle 8"/>
-          <p:cNvSpPr/>
-          <p:nvPr/>
-        </p:nvSpPr>
-        <p:spPr>
-          <a:xfrm rot="5400000">
-            <a:off x="6021324" y="1673352"/>
-            <a:ext cx="146304" cy="146304"/>
-          </a:xfrm>
-          <a:prstGeom prst="triangle">
-            <a:avLst/>
-          </a:prstGeom>
-          <a:solidFill>
-            <a:srgbClr val="0D9488"/>
-          </a:solidFill>
-          <a:ln>
-            <a:noFill/>
-          </a:ln>
-          <a:effectLst/>
-        </p:spPr>
-        <p:style>
-          <a:lnRef idx="1">
-            <a:schemeClr val="accent1"/>
-          </a:lnRef>
-          <a:fillRef idx="3">
-            <a:schemeClr val="accent1"/>
-          </a:fillRef>
-          <a:effectRef idx="2">
-            <a:schemeClr val="accent1"/>
-          </a:effectRef>
-          <a:fontRef idx="minor">
-            <a:schemeClr val="lt1"/>
-          </a:fontRef>
-        </p:style>
-        <p:txBody>
-          <a:bodyPr rtlCol="0" anchor="ctr"/>
-          <a:lstStyle/>
-          <a:p>
-            <a:pPr algn="ctr"/>
-          </a:p>
-        </p:txBody>
-      </p:sp>
-      <p:sp>
-        <p:nvSpPr>
-          <p:cNvPr id="10" name="Rectangle 9"/>
-          <p:cNvSpPr/>
-          <p:nvPr/>
-        </p:nvSpPr>
-        <p:spPr>
-          <a:xfrm>
-            <a:off x="7622438" y="1730959"/>
-            <a:ext cx="1995220" cy="31089"/>
-          </a:xfrm>
-          <a:prstGeom prst="rect">
-            <a:avLst/>
-          </a:prstGeom>
-          <a:solidFill>
-            <a:srgbClr val="14B8A6"/>
-          </a:solidFill>
-          <a:ln>
-            <a:noFill/>
-          </a:ln>
-          <a:effectLst/>
-        </p:spPr>
-        <p:style>
-          <a:lnRef idx="1">
-            <a:schemeClr val="accent1"/>
-          </a:lnRef>
-          <a:fillRef idx="3">
-            <a:schemeClr val="accent1"/>
-          </a:fillRef>
-          <a:effectRef idx="2">
-            <a:schemeClr val="accent1"/>
-          </a:effectRef>
-          <a:fontRef idx="minor">
-            <a:schemeClr val="lt1"/>
-          </a:fontRef>
-        </p:style>
-        <p:txBody>
-          <a:bodyPr rtlCol="0" anchor="ctr"/>
-          <a:lstStyle/>
-          <a:p>
-            <a:pPr algn="ctr"/>
-          </a:p>
-        </p:txBody>
-      </p:sp>
-      <p:sp>
-        <p:nvSpPr>
-          <p:cNvPr id="11" name="Isosceles Triangle 10"/>
-          <p:cNvSpPr/>
-          <p:nvPr/>
-        </p:nvSpPr>
-        <p:spPr>
-          <a:xfrm rot="5400000">
-            <a:off x="8546896" y="1673352"/>
-            <a:ext cx="146304" cy="146304"/>
-          </a:xfrm>
-          <a:prstGeom prst="triangle">
-            <a:avLst/>
-          </a:prstGeom>
-          <a:solidFill>
-            <a:srgbClr val="0D9488"/>
-          </a:solidFill>
-          <a:ln>
-            <a:noFill/>
-          </a:ln>
-          <a:effectLst/>
-        </p:spPr>
-        <p:style>
-          <a:lnRef idx="1">
-            <a:schemeClr val="accent1"/>
-          </a:lnRef>
-          <a:fillRef idx="3">
-            <a:schemeClr val="accent1"/>
-          </a:fillRef>
-          <a:effectRef idx="2">
-            <a:schemeClr val="accent1"/>
-          </a:effectRef>
-          <a:fontRef idx="minor">
-            <a:schemeClr val="lt1"/>
-          </a:fontRef>
-        </p:style>
-        <p:txBody>
-          <a:bodyPr rtlCol="0" anchor="ctr"/>
-          <a:lstStyle/>
-          <a:p>
-            <a:pPr algn="ctr"/>
-          </a:p>
-        </p:txBody>
-      </p:sp>
-      <p:sp>
-        <p:nvSpPr>
-          <p:cNvPr id="12" name="Oval 11"/>
-          <p:cNvSpPr/>
-          <p:nvPr/>
-        </p:nvSpPr>
-        <p:spPr>
-          <a:xfrm>
-            <a:off x="2040940" y="1481328"/>
-            <a:ext cx="530352" cy="530352"/>
-          </a:xfrm>
-          <a:prstGeom prst="ellipse">
-            <a:avLst/>
-          </a:prstGeom>
-          <a:solidFill>
-            <a:srgbClr val="0D9488"/>
-          </a:solidFill>
-          <a:ln>
-            <a:noFill/>
-          </a:ln>
-          <a:effectLst/>
-        </p:spPr>
-        <p:style>
-          <a:lnRef idx="1">
-            <a:schemeClr val="accent1"/>
-          </a:lnRef>
-          <a:fillRef idx="3">
-            <a:schemeClr val="accent1"/>
-          </a:fillRef>
-          <a:effectRef idx="2">
-            <a:schemeClr val="accent1"/>
-          </a:effectRef>
-          <a:fontRef idx="minor">
-            <a:schemeClr val="lt1"/>
-          </a:fontRef>
-        </p:style>
-        <p:txBody>
-          <a:bodyPr rtlCol="0" anchor="ctr"/>
-          <a:lstStyle/>
-          <a:p>
-            <a:pPr algn="ctr"/>
-          </a:p>
-        </p:txBody>
-      </p:sp>
-      <p:sp>
-        <p:nvSpPr>
-          <p:cNvPr id="13" name="TextBox 12"/>
+          <p:cNvPr id="10" name="TextBox 9"/>
           <p:cNvSpPr txBox="1"/>
           <p:nvPr/>
         </p:nvSpPr>
@@ -6695,7 +6563,7 @@
       </p:sp>
       <p:sp>
         <p:nvSpPr>
-          <p:cNvPr id="14" name="Rounded Rectangle 13"/>
+          <p:cNvPr id="11" name="Rounded Rectangle 10"/>
           <p:cNvSpPr/>
           <p:nvPr/>
         </p:nvSpPr>
@@ -6743,7 +6611,7 @@
       </p:sp>
       <p:sp>
         <p:nvSpPr>
-          <p:cNvPr id="15" name="TextBox 14"/>
+          <p:cNvPr id="12" name="TextBox 11"/>
           <p:cNvSpPr txBox="1"/>
           <p:nvPr/>
         </p:nvSpPr>
@@ -6778,7 +6646,7 @@
       </p:sp>
       <p:sp>
         <p:nvSpPr>
-          <p:cNvPr id="16" name="TextBox 15"/>
+          <p:cNvPr id="13" name="TextBox 12"/>
           <p:cNvSpPr txBox="1"/>
           <p:nvPr/>
         </p:nvSpPr>
@@ -6817,7 +6685,7 @@
       </p:sp>
       <p:sp>
         <p:nvSpPr>
-          <p:cNvPr id="17" name="Oval 16"/>
+          <p:cNvPr id="14" name="Oval 13"/>
           <p:cNvSpPr/>
           <p:nvPr/>
         </p:nvSpPr>
@@ -6861,7 +6729,7 @@
       </p:sp>
       <p:sp>
         <p:nvSpPr>
-          <p:cNvPr id="18" name="TextBox 17"/>
+          <p:cNvPr id="15" name="TextBox 14"/>
           <p:cNvSpPr txBox="1"/>
           <p:nvPr/>
         </p:nvSpPr>
@@ -6896,7 +6764,7 @@
       </p:sp>
       <p:sp>
         <p:nvSpPr>
-          <p:cNvPr id="19" name="Rounded Rectangle 18"/>
+          <p:cNvPr id="16" name="Rounded Rectangle 15"/>
           <p:cNvSpPr/>
           <p:nvPr/>
         </p:nvSpPr>
@@ -6944,7 +6812,7 @@
       </p:sp>
       <p:sp>
         <p:nvSpPr>
-          <p:cNvPr id="20" name="TextBox 19"/>
+          <p:cNvPr id="17" name="TextBox 16"/>
           <p:cNvSpPr txBox="1"/>
           <p:nvPr/>
         </p:nvSpPr>
@@ -6979,7 +6847,7 @@
       </p:sp>
       <p:sp>
         <p:nvSpPr>
-          <p:cNvPr id="21" name="TextBox 20"/>
+          <p:cNvPr id="18" name="TextBox 17"/>
           <p:cNvSpPr txBox="1"/>
           <p:nvPr/>
         </p:nvSpPr>
@@ -7018,7 +6886,7 @@
       </p:sp>
       <p:sp>
         <p:nvSpPr>
-          <p:cNvPr id="22" name="Oval 21"/>
+          <p:cNvPr id="19" name="Oval 18"/>
           <p:cNvSpPr/>
           <p:nvPr/>
         </p:nvSpPr>
@@ -7062,7 +6930,7 @@
       </p:sp>
       <p:sp>
         <p:nvSpPr>
-          <p:cNvPr id="23" name="TextBox 22"/>
+          <p:cNvPr id="20" name="TextBox 19"/>
           <p:cNvSpPr txBox="1"/>
           <p:nvPr/>
         </p:nvSpPr>
@@ -7097,7 +6965,7 @@
       </p:sp>
       <p:sp>
         <p:nvSpPr>
-          <p:cNvPr id="24" name="Rounded Rectangle 23"/>
+          <p:cNvPr id="21" name="Rounded Rectangle 20"/>
           <p:cNvSpPr/>
           <p:nvPr/>
         </p:nvSpPr>
@@ -7145,7 +7013,7 @@
       </p:sp>
       <p:sp>
         <p:nvSpPr>
-          <p:cNvPr id="25" name="TextBox 24"/>
+          <p:cNvPr id="22" name="TextBox 21"/>
           <p:cNvSpPr txBox="1"/>
           <p:nvPr/>
         </p:nvSpPr>
@@ -7180,7 +7048,7 @@
       </p:sp>
       <p:sp>
         <p:nvSpPr>
-          <p:cNvPr id="26" name="TextBox 25"/>
+          <p:cNvPr id="23" name="TextBox 22"/>
           <p:cNvSpPr txBox="1"/>
           <p:nvPr/>
         </p:nvSpPr>
@@ -7219,7 +7087,7 @@
       </p:sp>
       <p:sp>
         <p:nvSpPr>
-          <p:cNvPr id="27" name="Oval 26"/>
+          <p:cNvPr id="24" name="Oval 23"/>
           <p:cNvSpPr/>
           <p:nvPr/>
         </p:nvSpPr>
@@ -7263,7 +7131,7 @@
       </p:sp>
       <p:sp>
         <p:nvSpPr>
-          <p:cNvPr id="28" name="TextBox 27"/>
+          <p:cNvPr id="25" name="TextBox 24"/>
           <p:cNvSpPr txBox="1"/>
           <p:nvPr/>
         </p:nvSpPr>
@@ -7298,7 +7166,7 @@
       </p:sp>
       <p:sp>
         <p:nvSpPr>
-          <p:cNvPr id="29" name="Rounded Rectangle 28"/>
+          <p:cNvPr id="26" name="Rounded Rectangle 25"/>
           <p:cNvSpPr/>
           <p:nvPr/>
         </p:nvSpPr>
@@ -7346,7 +7214,7 @@
       </p:sp>
       <p:sp>
         <p:nvSpPr>
-          <p:cNvPr id="30" name="TextBox 29"/>
+          <p:cNvPr id="27" name="TextBox 26"/>
           <p:cNvSpPr txBox="1"/>
           <p:nvPr/>
         </p:nvSpPr>
@@ -7381,7 +7249,7 @@
       </p:sp>
       <p:sp>
         <p:nvSpPr>
-          <p:cNvPr id="31" name="TextBox 30"/>
+          <p:cNvPr id="28" name="TextBox 27"/>
           <p:cNvSpPr txBox="1"/>
           <p:nvPr/>
         </p:nvSpPr>
@@ -7420,7 +7288,7 @@
       </p:sp>
       <p:sp>
         <p:nvSpPr>
-          <p:cNvPr id="32" name="TextBox 31"/>
+          <p:cNvPr id="29" name="TextBox 28"/>
           <p:cNvSpPr txBox="1"/>
           <p:nvPr/>
         </p:nvSpPr>
@@ -7455,7 +7323,7 @@
       </p:sp>
       <p:sp>
         <p:nvSpPr>
-          <p:cNvPr id="33" name="TextBox 32"/>
+          <p:cNvPr id="30" name="TextBox 29"/>
           <p:cNvSpPr txBox="1"/>
           <p:nvPr/>
         </p:nvSpPr>
@@ -7490,7 +7358,7 @@
       </p:sp>
       <p:sp>
         <p:nvSpPr>
-          <p:cNvPr id="34" name="Rectangle 33"/>
+          <p:cNvPr id="31" name="Rectangle 30"/>
           <p:cNvSpPr/>
           <p:nvPr/>
         </p:nvSpPr>
@@ -8014,7 +7882,7 @@
           <a:p>
             <a:pPr>
               <a:lnSpc>
-                <a:spcPct val="115000"/>
+                <a:spcPct val="149500"/>
               </a:lnSpc>
             </a:pPr>
             <a:r>
@@ -8039,7 +7907,7 @@
           <a:p>
             <a:pPr>
               <a:lnSpc>
-                <a:spcPct val="115000"/>
+                <a:spcPct val="149500"/>
               </a:lnSpc>
             </a:pPr>
             <a:r>
@@ -8064,7 +7932,7 @@
           <a:p>
             <a:pPr>
               <a:lnSpc>
-                <a:spcPct val="115000"/>
+                <a:spcPct val="149500"/>
               </a:lnSpc>
             </a:pPr>
             <a:r>
@@ -8089,7 +7957,7 @@
           <a:p>
             <a:pPr>
               <a:lnSpc>
-                <a:spcPct val="115000"/>
+                <a:spcPct val="149500"/>
               </a:lnSpc>
             </a:pPr>
             <a:r>
@@ -8114,7 +7982,7 @@
           <a:p>
             <a:pPr>
               <a:lnSpc>
-                <a:spcPct val="115000"/>
+                <a:spcPct val="149500"/>
               </a:lnSpc>
             </a:pPr>
             <a:r>
@@ -10534,7 +10402,7 @@
           <a:p>
             <a:pPr>
               <a:lnSpc>
-                <a:spcPct val="115000"/>
+                <a:spcPct val="149500"/>
               </a:lnSpc>
             </a:pPr>
             <a:r>
@@ -10559,7 +10427,7 @@
           <a:p>
             <a:pPr>
               <a:lnSpc>
-                <a:spcPct val="115000"/>
+                <a:spcPct val="149500"/>
               </a:lnSpc>
             </a:pPr>
             <a:r>
@@ -10584,7 +10452,7 @@
           <a:p>
             <a:pPr>
               <a:lnSpc>
-                <a:spcPct val="115000"/>
+                <a:spcPct val="149500"/>
               </a:lnSpc>
             </a:pPr>
             <a:r>
@@ -11089,7 +10957,7 @@
           <a:p>
             <a:pPr>
               <a:lnSpc>
-                <a:spcPct val="115000"/>
+                <a:spcPct val="149500"/>
               </a:lnSpc>
             </a:pPr>
             <a:r>
@@ -11114,7 +10982,7 @@
           <a:p>
             <a:pPr>
               <a:lnSpc>
-                <a:spcPct val="115000"/>
+                <a:spcPct val="149500"/>
               </a:lnSpc>
             </a:pPr>
             <a:r>
@@ -11139,7 +11007,7 @@
           <a:p>
             <a:pPr>
               <a:lnSpc>
-                <a:spcPct val="115000"/>
+                <a:spcPct val="149500"/>
               </a:lnSpc>
             </a:pPr>
             <a:r>
@@ -11164,7 +11032,7 @@
           <a:p>
             <a:pPr>
               <a:lnSpc>
-                <a:spcPct val="115000"/>
+                <a:spcPct val="149500"/>
               </a:lnSpc>
             </a:pPr>
             <a:r>

--- a/class/cloud_infra_mgmt/02주차_Docker기초/01_강의자료/1차시_컨테이너명령어심화.pptx
+++ b/class/cloud_infra_mgmt/02주차_Docker기초/01_강의자료/1차시_컨테이너명령어심화.pptx
@@ -4733,6 +4733,8 @@
                   <a:srgbClr val="14B8A6"/>
                 </a:solidFill>
                 <a:latin typeface="맑은 고딕"/>
+                <a:ea typeface="맑은 고딕"/>
+                <a:cs typeface="맑은 고딕"/>
               </a:rPr>
               <a:t>클라우드인프라관리  ·  2주차 1차시</a:t>
             </a:r>
@@ -4768,6 +4770,8 @@
                   <a:srgbClr val="FFFFFF"/>
                 </a:solidFill>
                 <a:latin typeface="맑은 고딕"/>
+                <a:ea typeface="맑은 고딕"/>
+                <a:cs typeface="맑은 고딕"/>
               </a:rPr>
               <a:t>Docker 컨테이너 명령어 심화</a:t>
             </a:r>
@@ -4803,6 +4807,8 @@
                   <a:srgbClr val="C9D3E6"/>
                 </a:solidFill>
                 <a:latin typeface="맑은 고딕"/>
+                <a:ea typeface="맑은 고딕"/>
+                <a:cs typeface="맑은 고딕"/>
               </a:rPr>
               <a:t>생명주기 관리 · logs · exec</a:t>
             </a:r>
@@ -4838,6 +4844,8 @@
                   <a:srgbClr val="FFFFFF"/>
                 </a:solidFill>
                 <a:latin typeface="맑은 고딕"/>
+                <a:ea typeface="맑은 고딕"/>
+                <a:cs typeface="맑은 고딕"/>
               </a:rPr>
               <a:t>영남이공대학교 김지윤교수</a:t>
             </a:r>
@@ -4997,6 +5005,8 @@
                   <a:srgbClr val="14213D"/>
                 </a:solidFill>
                 <a:latin typeface="맑은 고딕"/>
+                <a:ea typeface="맑은 고딕"/>
+                <a:cs typeface="맑은 고딕"/>
               </a:rPr>
               <a:t>03</a:t>
             </a:r>
@@ -5032,6 +5042,8 @@
                   <a:srgbClr val="14B8A6"/>
                 </a:solidFill>
                 <a:latin typeface="맑은 고딕"/>
+                <a:ea typeface="맑은 고딕"/>
+                <a:cs typeface="맑은 고딕"/>
               </a:rPr>
               <a:t>실습 안내</a:t>
             </a:r>
@@ -5067,6 +5079,8 @@
                   <a:srgbClr val="FFFFFF"/>
                 </a:solidFill>
                 <a:latin typeface="맑은 고딕"/>
+                <a:ea typeface="맑은 고딕"/>
+                <a:cs typeface="맑은 고딕"/>
               </a:rPr>
               <a:t>VM 과제 — 동일 실습</a:t>
             </a:r>
@@ -5106,6 +5120,8 @@
                   <a:srgbClr val="0D9488"/>
                 </a:solidFill>
                 <a:latin typeface="맑은 고딕"/>
+                <a:ea typeface="맑은 고딕"/>
+                <a:cs typeface="맑은 고딕"/>
               </a:rPr>
               <a:t>●  </a:t>
             </a:r>
@@ -5115,6 +5131,8 @@
                   <a:srgbClr val="222733"/>
                 </a:solidFill>
                 <a:latin typeface="맑은 고딕"/>
+                <a:ea typeface="맑은 고딕"/>
+                <a:cs typeface="맑은 고딕"/>
               </a:rPr>
               <a:t>개인 VM(cloud-lab)에서 위 명령어를 동일하게 실행</a:t>
             </a:r>
@@ -5131,6 +5149,8 @@
                   <a:srgbClr val="0D9488"/>
                 </a:solidFill>
                 <a:latin typeface="맑은 고딕"/>
+                <a:ea typeface="맑은 고딕"/>
+                <a:cs typeface="맑은 고딕"/>
               </a:rPr>
               <a:t>●  </a:t>
             </a:r>
@@ -5140,6 +5160,8 @@
                   <a:srgbClr val="222733"/>
                 </a:solidFill>
                 <a:latin typeface="맑은 고딕"/>
+                <a:ea typeface="맑은 고딕"/>
+                <a:cs typeface="맑은 고딕"/>
               </a:rPr>
               <a:t>docker ps -a 결과와 docker logs 출력을 캡처</a:t>
             </a:r>
@@ -5156,6 +5178,8 @@
                   <a:srgbClr val="0D9488"/>
                 </a:solidFill>
                 <a:latin typeface="맑은 고딕"/>
+                <a:ea typeface="맑은 고딕"/>
+                <a:cs typeface="맑은 고딕"/>
               </a:rPr>
               <a:t>●  </a:t>
             </a:r>
@@ -5165,6 +5189,8 @@
                   <a:srgbClr val="222733"/>
                 </a:solidFill>
                 <a:latin typeface="맑은 고딕"/>
+                <a:ea typeface="맑은 고딕"/>
+                <a:cs typeface="맑은 고딕"/>
               </a:rPr>
               <a:t>LMS 과제 게시판에 제출</a:t>
             </a:r>
@@ -5200,6 +5226,8 @@
                   <a:srgbClr val="5B6373"/>
                 </a:solidFill>
                 <a:latin typeface="맑은 고딕"/>
+                <a:ea typeface="맑은 고딕"/>
+                <a:cs typeface="맑은 고딕"/>
               </a:rPr>
               <a:t>클라우드인프라관리  ·  2주차 1차시</a:t>
             </a:r>
@@ -5235,6 +5263,8 @@
                   <a:srgbClr val="5B6373"/>
                 </a:solidFill>
                 <a:latin typeface="맑은 고딕"/>
+                <a:ea typeface="맑은 고딕"/>
+                <a:cs typeface="맑은 고딕"/>
               </a:rPr>
               <a:t>10 / 12</a:t>
             </a:r>
@@ -5420,6 +5450,8 @@
                   <a:srgbClr val="FFFFFF"/>
                 </a:solidFill>
                 <a:latin typeface="맑은 고딕"/>
+                <a:ea typeface="맑은 고딕"/>
+                <a:cs typeface="맑은 고딕"/>
               </a:rPr>
               <a:t>오늘의 정리</a:t>
             </a:r>
@@ -5473,6 +5505,8 @@
                   <a:srgbClr val="14213D"/>
                 </a:solidFill>
                 <a:latin typeface="맑은 고딕"/>
+                <a:ea typeface="맑은 고딕"/>
+                <a:cs typeface="맑은 고딕"/>
               </a:rPr>
               <a:t>1</a:t>
             </a:r>
@@ -5508,6 +5542,8 @@
                   <a:srgbClr val="FFFFFF"/>
                 </a:solidFill>
                 <a:latin typeface="맑은 고딕"/>
+                <a:ea typeface="맑은 고딕"/>
+                <a:cs typeface="맑은 고딕"/>
               </a:rPr>
               <a:t>컨테이너는 Created→Running→Stopped→Removed 상태를 가진다</a:t>
             </a:r>
@@ -5561,6 +5597,8 @@
                   <a:srgbClr val="14213D"/>
                 </a:solidFill>
                 <a:latin typeface="맑은 고딕"/>
+                <a:ea typeface="맑은 고딕"/>
+                <a:cs typeface="맑은 고딕"/>
               </a:rPr>
               <a:t>2</a:t>
             </a:r>
@@ -5596,6 +5634,8 @@
                   <a:srgbClr val="FFFFFF"/>
                 </a:solidFill>
                 <a:latin typeface="맑은 고딕"/>
+                <a:ea typeface="맑은 고딕"/>
+                <a:cs typeface="맑은 고딕"/>
               </a:rPr>
               <a:t>logs = 밖에서 구경, exec = 안으로 직접 진입</a:t>
             </a:r>
@@ -5737,6 +5777,8 @@
                   <a:srgbClr val="FFFFFF"/>
                 </a:solidFill>
                 <a:latin typeface="맑은 고딕"/>
+                <a:ea typeface="맑은 고딕"/>
+                <a:cs typeface="맑은 고딕"/>
               </a:rPr>
               <a:t>다음 차시 예고</a:t>
             </a:r>
@@ -5772,6 +5814,8 @@
                   <a:srgbClr val="14B8A6"/>
                 </a:solidFill>
                 <a:latin typeface="맑은 고딕"/>
+                <a:ea typeface="맑은 고딕"/>
+                <a:cs typeface="맑은 고딕"/>
               </a:rPr>
               <a:t>다음 차시 예고 — 2주차 2차시</a:t>
             </a:r>
@@ -5807,6 +5851,8 @@
                   <a:srgbClr val="FFFFFF"/>
                 </a:solidFill>
                 <a:latin typeface="맑은 고딕"/>
+                <a:ea typeface="맑은 고딕"/>
+                <a:cs typeface="맑은 고딕"/>
               </a:rPr>
               <a:t>지금까지는 컨테이너를 지우면 데이터도 함께 사라졌습니다. Bind Mount로 컨테이너 데이터를 VM에 영구 저장하는 방법을 배웁니다.</a:t>
             </a:r>
@@ -5948,6 +5994,8 @@
                   <a:srgbClr val="14B8A6"/>
                 </a:solidFill>
                 <a:latin typeface="맑은 고딕"/>
+                <a:ea typeface="맑은 고딕"/>
+                <a:cs typeface="맑은 고딕"/>
               </a:rPr>
               <a:t>SESSION OVERVIEW</a:t>
             </a:r>
@@ -5983,6 +6031,8 @@
                   <a:srgbClr val="FFFFFF"/>
                 </a:solidFill>
                 <a:latin typeface="맑은 고딕"/>
+                <a:ea typeface="맑은 고딕"/>
+                <a:cs typeface="맑은 고딕"/>
               </a:rPr>
               <a:t>오늘의 학습 목표</a:t>
             </a:r>
@@ -6022,6 +6072,8 @@
                   <a:srgbClr val="222733"/>
                 </a:solidFill>
                 <a:latin typeface="맑은 고딕"/>
+                <a:ea typeface="맑은 고딕"/>
+                <a:cs typeface="맑은 고딕"/>
               </a:rPr>
               <a:t>1.  컨테이너의 생명주기(Created→Running→Stopped→Removed)를 이해한다</a:t>
             </a:r>
@@ -6038,6 +6090,8 @@
                   <a:srgbClr val="222733"/>
                 </a:solidFill>
                 <a:latin typeface="맑은 고딕"/>
+                <a:ea typeface="맑은 고딕"/>
+                <a:cs typeface="맑은 고딕"/>
               </a:rPr>
               <a:t>2.  run/ps/stop/start/rm 명령어로 컨테이너를 자유롭게 다룬다</a:t>
             </a:r>
@@ -6054,6 +6108,8 @@
                   <a:srgbClr val="222733"/>
                 </a:solidFill>
                 <a:latin typeface="맑은 고딕"/>
+                <a:ea typeface="맑은 고딕"/>
+                <a:cs typeface="맑은 고딕"/>
               </a:rPr>
               <a:t>3.  logs·exec로 실행 중인 컨테이너 내부를 들여다본다</a:t>
             </a:r>
@@ -6089,6 +6145,8 @@
                   <a:srgbClr val="5B6373"/>
                 </a:solidFill>
                 <a:latin typeface="맑은 고딕"/>
+                <a:ea typeface="맑은 고딕"/>
+                <a:cs typeface="맑은 고딕"/>
               </a:rPr>
               <a:t>클라우드인프라관리  ·  2주차 1차시</a:t>
             </a:r>
@@ -6124,6 +6182,8 @@
                   <a:srgbClr val="5B6373"/>
                 </a:solidFill>
                 <a:latin typeface="맑은 고딕"/>
+                <a:ea typeface="맑은 고딕"/>
+                <a:cs typeface="맑은 고딕"/>
               </a:rPr>
               <a:t>02 / 12</a:t>
             </a:r>
@@ -6309,6 +6369,8 @@
                   <a:srgbClr val="14B8A6"/>
                 </a:solidFill>
                 <a:latin typeface="맑은 고딕"/>
+                <a:ea typeface="맑은 고딕"/>
+                <a:cs typeface="맑은 고딕"/>
               </a:rPr>
               <a:t>SESSION OVERVIEW</a:t>
             </a:r>
@@ -6344,6 +6406,8 @@
                   <a:srgbClr val="FFFFFF"/>
                 </a:solidFill>
                 <a:latin typeface="맑은 고딕"/>
+                <a:ea typeface="맑은 고딕"/>
+                <a:cs typeface="맑은 고딕"/>
               </a:rPr>
               <a:t>오늘의 진행 순서</a:t>
             </a:r>
@@ -6555,6 +6619,8 @@
                   <a:srgbClr val="FFFFFF"/>
                 </a:solidFill>
                 <a:latin typeface="맑은 고딕"/>
+                <a:ea typeface="맑은 고딕"/>
+                <a:cs typeface="맑은 고딕"/>
               </a:rPr>
               <a:t>1</a:t>
             </a:r>
@@ -6638,6 +6704,8 @@
                   <a:srgbClr val="14213D"/>
                 </a:solidFill>
                 <a:latin typeface="맑은 고딕"/>
+                <a:ea typeface="맑은 고딕"/>
+                <a:cs typeface="맑은 고딕"/>
               </a:rPr>
               <a:t>개념 설명</a:t>
             </a:r>
@@ -6677,6 +6745,8 @@
                   <a:srgbClr val="222733"/>
                 </a:solidFill>
                 <a:latin typeface="맑은 고딕"/>
+                <a:ea typeface="맑은 고딕"/>
+                <a:cs typeface="맑은 고딕"/>
               </a:rPr>
               <a:t>강의자료 기반 직접 강의</a:t>
             </a:r>
@@ -6756,6 +6826,8 @@
                   <a:srgbClr val="FFFFFF"/>
                 </a:solidFill>
                 <a:latin typeface="맑은 고딕"/>
+                <a:ea typeface="맑은 고딕"/>
+                <a:cs typeface="맑은 고딕"/>
               </a:rPr>
               <a:t>2</a:t>
             </a:r>
@@ -6839,6 +6911,8 @@
                   <a:srgbClr val="14213D"/>
                 </a:solidFill>
                 <a:latin typeface="맑은 고딕"/>
+                <a:ea typeface="맑은 고딕"/>
+                <a:cs typeface="맑은 고딕"/>
               </a:rPr>
               <a:t>Killercoda</a:t>
             </a:r>
@@ -6878,6 +6952,8 @@
                   <a:srgbClr val="222733"/>
                 </a:solidFill>
                 <a:latin typeface="맑은 고딕"/>
+                <a:ea typeface="맑은 고딕"/>
+                <a:cs typeface="맑은 고딕"/>
               </a:rPr>
               <a:t>생명주기 명령어 실습</a:t>
             </a:r>
@@ -6957,6 +7033,8 @@
                   <a:srgbClr val="FFFFFF"/>
                 </a:solidFill>
                 <a:latin typeface="맑은 고딕"/>
+                <a:ea typeface="맑은 고딕"/>
+                <a:cs typeface="맑은 고딕"/>
               </a:rPr>
               <a:t>3</a:t>
             </a:r>
@@ -7040,6 +7118,8 @@
                   <a:srgbClr val="14213D"/>
                 </a:solidFill>
                 <a:latin typeface="맑은 고딕"/>
+                <a:ea typeface="맑은 고딕"/>
+                <a:cs typeface="맑은 고딕"/>
               </a:rPr>
               <a:t>VM 안내</a:t>
             </a:r>
@@ -7079,6 +7159,8 @@
                   <a:srgbClr val="222733"/>
                 </a:solidFill>
                 <a:latin typeface="맑은 고딕"/>
+                <a:ea typeface="맑은 고딕"/>
+                <a:cs typeface="맑은 고딕"/>
               </a:rPr>
               <a:t>VM에서 동일 실습</a:t>
             </a:r>
@@ -7158,6 +7240,8 @@
                   <a:srgbClr val="FFFFFF"/>
                 </a:solidFill>
                 <a:latin typeface="맑은 고딕"/>
+                <a:ea typeface="맑은 고딕"/>
+                <a:cs typeface="맑은 고딕"/>
               </a:rPr>
               <a:t>4</a:t>
             </a:r>
@@ -7241,6 +7325,8 @@
                   <a:srgbClr val="14213D"/>
                 </a:solidFill>
                 <a:latin typeface="맑은 고딕"/>
+                <a:ea typeface="맑은 고딕"/>
+                <a:cs typeface="맑은 고딕"/>
               </a:rPr>
               <a:t>결과 제출</a:t>
             </a:r>
@@ -7280,6 +7366,8 @@
                   <a:srgbClr val="222733"/>
                 </a:solidFill>
                 <a:latin typeface="맑은 고딕"/>
+                <a:ea typeface="맑은 고딕"/>
+                <a:cs typeface="맑은 고딕"/>
               </a:rPr>
               <a:t>체크리스트 제출</a:t>
             </a:r>
@@ -7315,6 +7403,8 @@
                   <a:srgbClr val="5B6373"/>
                 </a:solidFill>
                 <a:latin typeface="맑은 고딕"/>
+                <a:ea typeface="맑은 고딕"/>
+                <a:cs typeface="맑은 고딕"/>
               </a:rPr>
               <a:t>클라우드인프라관리  ·  2주차 1차시</a:t>
             </a:r>
@@ -7350,6 +7440,8 @@
                   <a:srgbClr val="5B6373"/>
                 </a:solidFill>
                 <a:latin typeface="맑은 고딕"/>
+                <a:ea typeface="맑은 고딕"/>
+                <a:cs typeface="맑은 고딕"/>
               </a:rPr>
               <a:t>03 / 12</a:t>
             </a:r>
@@ -7553,6 +7645,8 @@
                   <a:srgbClr val="14213D"/>
                 </a:solidFill>
                 <a:latin typeface="맑은 고딕"/>
+                <a:ea typeface="맑은 고딕"/>
+                <a:cs typeface="맑은 고딕"/>
               </a:rPr>
               <a:t>PART 01</a:t>
             </a:r>
@@ -7588,6 +7682,8 @@
                   <a:srgbClr val="FFFFFF"/>
                 </a:solidFill>
                 <a:latin typeface="맑은 고딕"/>
+                <a:ea typeface="맑은 고딕"/>
+                <a:cs typeface="맑은 고딕"/>
               </a:rPr>
               <a:t>컨테이너 생명주기</a:t>
             </a:r>
@@ -7623,6 +7719,8 @@
                   <a:srgbClr val="C9D3E6"/>
                 </a:solidFill>
                 <a:latin typeface="맑은 고딕"/>
+                <a:ea typeface="맑은 고딕"/>
+                <a:cs typeface="맑은 고딕"/>
               </a:rPr>
               <a:t>Created → Running → Stopped → Removed</a:t>
             </a:r>
@@ -7782,6 +7880,8 @@
                   <a:srgbClr val="14213D"/>
                 </a:solidFill>
                 <a:latin typeface="맑은 고딕"/>
+                <a:ea typeface="맑은 고딕"/>
+                <a:cs typeface="맑은 고딕"/>
               </a:rPr>
               <a:t>01</a:t>
             </a:r>
@@ -7817,6 +7917,8 @@
                   <a:srgbClr val="14B8A6"/>
                 </a:solidFill>
                 <a:latin typeface="맑은 고딕"/>
+                <a:ea typeface="맑은 고딕"/>
+                <a:cs typeface="맑은 고딕"/>
               </a:rPr>
               <a:t>PART 1 · 컨테이너 생명주기</a:t>
             </a:r>
@@ -7852,6 +7954,8 @@
                   <a:srgbClr val="FFFFFF"/>
                 </a:solidFill>
                 <a:latin typeface="맑은 고딕"/>
+                <a:ea typeface="맑은 고딕"/>
+                <a:cs typeface="맑은 고딕"/>
               </a:rPr>
               <a:t>컨테이너는 상태를 가진다</a:t>
             </a:r>
@@ -7891,6 +7995,8 @@
                   <a:srgbClr val="0D9488"/>
                 </a:solidFill>
                 <a:latin typeface="맑은 고딕"/>
+                <a:ea typeface="맑은 고딕"/>
+                <a:cs typeface="맑은 고딕"/>
               </a:rPr>
               <a:t>●  </a:t>
             </a:r>
@@ -7900,6 +8006,8 @@
                   <a:srgbClr val="222733"/>
                 </a:solidFill>
                 <a:latin typeface="맑은 고딕"/>
+                <a:ea typeface="맑은 고딕"/>
+                <a:cs typeface="맑은 고딕"/>
               </a:rPr>
               <a:t>docker create – 컨테이너를 만들지만 실행은 안 함</a:t>
             </a:r>
@@ -7916,6 +8024,8 @@
                   <a:srgbClr val="0D9488"/>
                 </a:solidFill>
                 <a:latin typeface="맑은 고딕"/>
+                <a:ea typeface="맑은 고딕"/>
+                <a:cs typeface="맑은 고딕"/>
               </a:rPr>
               <a:t>●  </a:t>
             </a:r>
@@ -7925,6 +8035,8 @@
                   <a:srgbClr val="222733"/>
                 </a:solidFill>
                 <a:latin typeface="맑은 고딕"/>
+                <a:ea typeface="맑은 고딕"/>
+                <a:cs typeface="맑은 고딕"/>
               </a:rPr>
               <a:t>docker start – 만들어진 컨테이너 실행</a:t>
             </a:r>
@@ -7941,6 +8053,8 @@
                   <a:srgbClr val="0D9488"/>
                 </a:solidFill>
                 <a:latin typeface="맑은 고딕"/>
+                <a:ea typeface="맑은 고딕"/>
+                <a:cs typeface="맑은 고딕"/>
               </a:rPr>
               <a:t>●  </a:t>
             </a:r>
@@ -7950,6 +8064,8 @@
                   <a:srgbClr val="222733"/>
                 </a:solidFill>
                 <a:latin typeface="맑은 고딕"/>
+                <a:ea typeface="맑은 고딕"/>
+                <a:cs typeface="맑은 고딕"/>
               </a:rPr>
               <a:t>docker run = create + start를 한 번에</a:t>
             </a:r>
@@ -7966,6 +8082,8 @@
                   <a:srgbClr val="0D9488"/>
                 </a:solidFill>
                 <a:latin typeface="맑은 고딕"/>
+                <a:ea typeface="맑은 고딕"/>
+                <a:cs typeface="맑은 고딕"/>
               </a:rPr>
               <a:t>●  </a:t>
             </a:r>
@@ -7975,6 +8093,8 @@
                   <a:srgbClr val="222733"/>
                 </a:solidFill>
                 <a:latin typeface="맑은 고딕"/>
+                <a:ea typeface="맑은 고딕"/>
+                <a:cs typeface="맑은 고딕"/>
               </a:rPr>
               <a:t>docker stop – 실행 중인 컨테이너 정지 (파일은 유지)</a:t>
             </a:r>
@@ -7991,6 +8111,8 @@
                   <a:srgbClr val="0D9488"/>
                 </a:solidFill>
                 <a:latin typeface="맑은 고딕"/>
+                <a:ea typeface="맑은 고딕"/>
+                <a:cs typeface="맑은 고딕"/>
               </a:rPr>
               <a:t>●  </a:t>
             </a:r>
@@ -8000,6 +8122,8 @@
                   <a:srgbClr val="222733"/>
                 </a:solidFill>
                 <a:latin typeface="맑은 고딕"/>
+                <a:ea typeface="맑은 고딕"/>
+                <a:cs typeface="맑은 고딕"/>
               </a:rPr>
               <a:t>docker rm – 정지된 컨테이너 완전 삭제</a:t>
             </a:r>
@@ -8035,6 +8159,8 @@
                   <a:srgbClr val="14213D"/>
                 </a:solidFill>
                 <a:latin typeface="맑은 고딕"/>
+                <a:ea typeface="맑은 고딕"/>
+                <a:cs typeface="맑은 고딕"/>
               </a:rPr>
               <a:t>상태 흐름</a:t>
             </a:r>
@@ -8114,6 +8240,8 @@
                   <a:srgbClr val="FFFFFF"/>
                 </a:solidFill>
                 <a:latin typeface="맑은 고딕"/>
+                <a:ea typeface="맑은 고딕"/>
+                <a:cs typeface="맑은 고딕"/>
               </a:rPr>
               <a:t>Created (생성됨)</a:t>
             </a:r>
@@ -8193,6 +8321,8 @@
                   <a:srgbClr val="FFFFFF"/>
                 </a:solidFill>
                 <a:latin typeface="맑은 고딕"/>
+                <a:ea typeface="맑은 고딕"/>
+                <a:cs typeface="맑은 고딕"/>
               </a:rPr>
               <a:t>Running (실행 중)</a:t>
             </a:r>
@@ -8272,6 +8402,8 @@
                   <a:srgbClr val="FFFFFF"/>
                 </a:solidFill>
                 <a:latin typeface="맑은 고딕"/>
+                <a:ea typeface="맑은 고딕"/>
+                <a:cs typeface="맑은 고딕"/>
               </a:rPr>
               <a:t>Stopped (정지됨)</a:t>
             </a:r>
@@ -8351,6 +8483,8 @@
                   <a:srgbClr val="FFFFFF"/>
                 </a:solidFill>
                 <a:latin typeface="맑은 고딕"/>
+                <a:ea typeface="맑은 고딕"/>
+                <a:cs typeface="맑은 고딕"/>
               </a:rPr>
               <a:t>Removed (삭제됨)</a:t>
             </a:r>
@@ -8386,6 +8520,8 @@
                   <a:srgbClr val="5B6373"/>
                 </a:solidFill>
                 <a:latin typeface="맑은 고딕"/>
+                <a:ea typeface="맑은 고딕"/>
+                <a:cs typeface="맑은 고딕"/>
               </a:rPr>
               <a:t>클라우드인프라관리  ·  2주차 1차시</a:t>
             </a:r>
@@ -8421,6 +8557,8 @@
                   <a:srgbClr val="5B6373"/>
                 </a:solidFill>
                 <a:latin typeface="맑은 고딕"/>
+                <a:ea typeface="맑은 고딕"/>
+                <a:cs typeface="맑은 고딕"/>
               </a:rPr>
               <a:t>05 / 12</a:t>
             </a:r>
@@ -8624,6 +8762,8 @@
                   <a:srgbClr val="14213D"/>
                 </a:solidFill>
                 <a:latin typeface="맑은 고딕"/>
+                <a:ea typeface="맑은 고딕"/>
+                <a:cs typeface="맑은 고딕"/>
               </a:rPr>
               <a:t>01</a:t>
             </a:r>
@@ -8659,6 +8799,8 @@
                   <a:srgbClr val="14B8A6"/>
                 </a:solidFill>
                 <a:latin typeface="맑은 고딕"/>
+                <a:ea typeface="맑은 고딕"/>
+                <a:cs typeface="맑은 고딕"/>
               </a:rPr>
               <a:t>PART 1 · 컨테이너 생명주기</a:t>
             </a:r>
@@ -8694,6 +8836,8 @@
                   <a:srgbClr val="FFFFFF"/>
                 </a:solidFill>
                 <a:latin typeface="맑은 고딕"/>
+                <a:ea typeface="맑은 고딕"/>
+                <a:cs typeface="맑은 고딕"/>
               </a:rPr>
               <a:t>핵심 명령어 한눈에 보기</a:t>
             </a:r>
@@ -8773,6 +8917,8 @@
                   <a:srgbClr val="FFFFFF"/>
                 </a:solidFill>
                 <a:latin typeface="맑은 고딕"/>
+                <a:ea typeface="맑은 고딕"/>
+                <a:cs typeface="맑은 고딕"/>
               </a:rPr>
               <a:t>명령어</a:t>
             </a:r>
@@ -8852,6 +8998,8 @@
                   <a:srgbClr val="FFFFFF"/>
                 </a:solidFill>
                 <a:latin typeface="맑은 고딕"/>
+                <a:ea typeface="맑은 고딕"/>
+                <a:cs typeface="맑은 고딕"/>
               </a:rPr>
               <a:t>역할</a:t>
             </a:r>
@@ -8931,6 +9079,8 @@
                   <a:srgbClr val="14213D"/>
                 </a:solidFill>
                 <a:latin typeface="맑은 고딕"/>
+                <a:ea typeface="맑은 고딕"/>
+                <a:cs typeface="맑은 고딕"/>
               </a:rPr>
               <a:t>docker run</a:t>
             </a:r>
@@ -9010,6 +9160,8 @@
                   <a:srgbClr val="222733"/>
                 </a:solidFill>
                 <a:latin typeface="맑은 고딕"/>
+                <a:ea typeface="맑은 고딕"/>
+                <a:cs typeface="맑은 고딕"/>
               </a:rPr>
               <a:t>이미지로 새 컨테이너 생성+실행</a:t>
             </a:r>
@@ -9089,6 +9241,8 @@
                   <a:srgbClr val="14213D"/>
                 </a:solidFill>
                 <a:latin typeface="맑은 고딕"/>
+                <a:ea typeface="맑은 고딕"/>
+                <a:cs typeface="맑은 고딕"/>
               </a:rPr>
               <a:t>docker ps / ps -a</a:t>
             </a:r>
@@ -9168,6 +9322,8 @@
                   <a:srgbClr val="222733"/>
                 </a:solidFill>
                 <a:latin typeface="맑은 고딕"/>
+                <a:ea typeface="맑은 고딕"/>
+                <a:cs typeface="맑은 고딕"/>
               </a:rPr>
               <a:t>실행 중 / 전체(정지 포함) 컨테이너 목록</a:t>
             </a:r>
@@ -9247,6 +9403,8 @@
                   <a:srgbClr val="14213D"/>
                 </a:solidFill>
                 <a:latin typeface="맑은 고딕"/>
+                <a:ea typeface="맑은 고딕"/>
+                <a:cs typeface="맑은 고딕"/>
               </a:rPr>
               <a:t>docker stop {name}</a:t>
             </a:r>
@@ -9326,6 +9484,8 @@
                   <a:srgbClr val="222733"/>
                 </a:solidFill>
                 <a:latin typeface="맑은 고딕"/>
+                <a:ea typeface="맑은 고딕"/>
+                <a:cs typeface="맑은 고딕"/>
               </a:rPr>
               <a:t>실행 중인 컨테이너 정지</a:t>
             </a:r>
@@ -9405,6 +9565,8 @@
                   <a:srgbClr val="14213D"/>
                 </a:solidFill>
                 <a:latin typeface="맑은 고딕"/>
+                <a:ea typeface="맑은 고딕"/>
+                <a:cs typeface="맑은 고딕"/>
               </a:rPr>
               <a:t>docker start {name}</a:t>
             </a:r>
@@ -9484,6 +9646,8 @@
                   <a:srgbClr val="222733"/>
                 </a:solidFill>
                 <a:latin typeface="맑은 고딕"/>
+                <a:ea typeface="맑은 고딕"/>
+                <a:cs typeface="맑은 고딕"/>
               </a:rPr>
               <a:t>정지된 컨테이너 다시 실행</a:t>
             </a:r>
@@ -9563,6 +9727,8 @@
                   <a:srgbClr val="14213D"/>
                 </a:solidFill>
                 <a:latin typeface="맑은 고딕"/>
+                <a:ea typeface="맑은 고딕"/>
+                <a:cs typeface="맑은 고딕"/>
               </a:rPr>
               <a:t>docker rm {name}</a:t>
             </a:r>
@@ -9642,6 +9808,8 @@
                   <a:srgbClr val="222733"/>
                 </a:solidFill>
                 <a:latin typeface="맑은 고딕"/>
+                <a:ea typeface="맑은 고딕"/>
+                <a:cs typeface="맑은 고딕"/>
               </a:rPr>
               <a:t>정지된 컨테이너 삭제</a:t>
             </a:r>
@@ -9721,6 +9889,8 @@
                   <a:srgbClr val="14213D"/>
                 </a:solidFill>
                 <a:latin typeface="맑은 고딕"/>
+                <a:ea typeface="맑은 고딕"/>
+                <a:cs typeface="맑은 고딕"/>
               </a:rPr>
               <a:t>docker rm -f {name}</a:t>
             </a:r>
@@ -9800,6 +9970,8 @@
                   <a:srgbClr val="222733"/>
                 </a:solidFill>
                 <a:latin typeface="맑은 고딕"/>
+                <a:ea typeface="맑은 고딕"/>
+                <a:cs typeface="맑은 고딕"/>
               </a:rPr>
               <a:t>실행 중이어도 강제로 즉시 삭제</a:t>
             </a:r>
@@ -9835,6 +10007,8 @@
                   <a:srgbClr val="5B6373"/>
                 </a:solidFill>
                 <a:latin typeface="맑은 고딕"/>
+                <a:ea typeface="맑은 고딕"/>
+                <a:cs typeface="맑은 고딕"/>
               </a:rPr>
               <a:t>클라우드인프라관리  ·  2주차 1차시</a:t>
             </a:r>
@@ -9870,6 +10044,8 @@
                   <a:srgbClr val="5B6373"/>
                 </a:solidFill>
                 <a:latin typeface="맑은 고딕"/>
+                <a:ea typeface="맑은 고딕"/>
+                <a:cs typeface="맑은 고딕"/>
               </a:rPr>
               <a:t>06 / 12</a:t>
             </a:r>
@@ -10073,6 +10249,8 @@
                   <a:srgbClr val="14213D"/>
                 </a:solidFill>
                 <a:latin typeface="맑은 고딕"/>
+                <a:ea typeface="맑은 고딕"/>
+                <a:cs typeface="맑은 고딕"/>
               </a:rPr>
               <a:t>PART 02</a:t>
             </a:r>
@@ -10108,6 +10286,8 @@
                   <a:srgbClr val="FFFFFF"/>
                 </a:solidFill>
                 <a:latin typeface="맑은 고딕"/>
+                <a:ea typeface="맑은 고딕"/>
+                <a:cs typeface="맑은 고딕"/>
               </a:rPr>
               <a:t>컨테이너 내부 들여다보기</a:t>
             </a:r>
@@ -10143,6 +10323,8 @@
                   <a:srgbClr val="C9D3E6"/>
                 </a:solidFill>
                 <a:latin typeface="맑은 고딕"/>
+                <a:ea typeface="맑은 고딕"/>
+                <a:cs typeface="맑은 고딕"/>
               </a:rPr>
               <a:t>logs · exec</a:t>
             </a:r>
@@ -10302,6 +10484,8 @@
                   <a:srgbClr val="14213D"/>
                 </a:solidFill>
                 <a:latin typeface="맑은 고딕"/>
+                <a:ea typeface="맑은 고딕"/>
+                <a:cs typeface="맑은 고딕"/>
               </a:rPr>
               <a:t>02</a:t>
             </a:r>
@@ -10337,6 +10521,8 @@
                   <a:srgbClr val="14B8A6"/>
                 </a:solidFill>
                 <a:latin typeface="맑은 고딕"/>
+                <a:ea typeface="맑은 고딕"/>
+                <a:cs typeface="맑은 고딕"/>
               </a:rPr>
               <a:t>PART 2 · 내부 들여다보기</a:t>
             </a:r>
@@ -10372,6 +10558,8 @@
                   <a:srgbClr val="FFFFFF"/>
                 </a:solidFill>
                 <a:latin typeface="맑은 고딕"/>
+                <a:ea typeface="맑은 고딕"/>
+                <a:cs typeface="맑은 고딕"/>
               </a:rPr>
               <a:t>logs와 exec, 언제 쓰나</a:t>
             </a:r>
@@ -10411,6 +10599,8 @@
                   <a:srgbClr val="0D9488"/>
                 </a:solidFill>
                 <a:latin typeface="맑은 고딕"/>
+                <a:ea typeface="맑은 고딕"/>
+                <a:cs typeface="맑은 고딕"/>
               </a:rPr>
               <a:t>●  </a:t>
             </a:r>
@@ -10420,6 +10610,8 @@
                   <a:srgbClr val="222733"/>
                 </a:solidFill>
                 <a:latin typeface="맑은 고딕"/>
+                <a:ea typeface="맑은 고딕"/>
+                <a:cs typeface="맑은 고딕"/>
               </a:rPr>
               <a:t>docker logs {name} – 컨테이너가 출력한 로그(표준출력) 확인</a:t>
             </a:r>
@@ -10436,6 +10628,8 @@
                   <a:srgbClr val="0D9488"/>
                 </a:solidFill>
                 <a:latin typeface="맑은 고딕"/>
+                <a:ea typeface="맑은 고딕"/>
+                <a:cs typeface="맑은 고딕"/>
               </a:rPr>
               <a:t>●  </a:t>
             </a:r>
@@ -10445,6 +10639,8 @@
                   <a:srgbClr val="222733"/>
                 </a:solidFill>
                 <a:latin typeface="맑은 고딕"/>
+                <a:ea typeface="맑은 고딕"/>
+                <a:cs typeface="맑은 고딕"/>
               </a:rPr>
               <a:t>docker logs -f {name} – 로그를 실시간으로 계속 지켜보기 (follow)</a:t>
             </a:r>
@@ -10461,6 +10657,8 @@
                   <a:srgbClr val="0D9488"/>
                 </a:solidFill>
                 <a:latin typeface="맑은 고딕"/>
+                <a:ea typeface="맑은 고딕"/>
+                <a:cs typeface="맑은 고딕"/>
               </a:rPr>
               <a:t>●  </a:t>
             </a:r>
@@ -10470,6 +10668,8 @@
                   <a:srgbClr val="222733"/>
                 </a:solidFill>
                 <a:latin typeface="맑은 고딕"/>
+                <a:ea typeface="맑은 고딕"/>
+                <a:cs typeface="맑은 고딕"/>
               </a:rPr>
               <a:t>docker exec -it {name} bash – 실행 중인 컨테이너 내부에 직접 들어가기</a:t>
             </a:r>
@@ -10549,6 +10749,8 @@
                   <a:srgbClr val="FFFFFF"/>
                 </a:solidFill>
                 <a:latin typeface="맑은 고딕"/>
+                <a:ea typeface="맑은 고딕"/>
+                <a:cs typeface="맑은 고딕"/>
               </a:rPr>
               <a:t>💡  둘의 차이</a:t>
             </a:r>
@@ -10584,6 +10786,8 @@
                   <a:srgbClr val="FFFFFF"/>
                 </a:solidFill>
                 <a:latin typeface="맑은 고딕"/>
+                <a:ea typeface="맑은 고딕"/>
+                <a:cs typeface="맑은 고딕"/>
               </a:rPr>
               <a:t>logs = 컨테이너 밖에서 출력만 구경하기 / exec = 컨테이너 안으로 직접 들어가서 확인하기</a:t>
             </a:r>
@@ -10619,6 +10823,8 @@
                   <a:srgbClr val="5B6373"/>
                 </a:solidFill>
                 <a:latin typeface="맑은 고딕"/>
+                <a:ea typeface="맑은 고딕"/>
+                <a:cs typeface="맑은 고딕"/>
               </a:rPr>
               <a:t>클라우드인프라관리  ·  2주차 1차시</a:t>
             </a:r>
@@ -10654,6 +10860,8 @@
                   <a:srgbClr val="5B6373"/>
                 </a:solidFill>
                 <a:latin typeface="맑은 고딕"/>
+                <a:ea typeface="맑은 고딕"/>
+                <a:cs typeface="맑은 고딕"/>
               </a:rPr>
               <a:t>08 / 12</a:t>
             </a:r>
@@ -10857,6 +11065,8 @@
                   <a:srgbClr val="14213D"/>
                 </a:solidFill>
                 <a:latin typeface="맑은 고딕"/>
+                <a:ea typeface="맑은 고딕"/>
+                <a:cs typeface="맑은 고딕"/>
               </a:rPr>
               <a:t>03</a:t>
             </a:r>
@@ -10892,6 +11102,8 @@
                   <a:srgbClr val="14B8A6"/>
                 </a:solidFill>
                 <a:latin typeface="맑은 고딕"/>
+                <a:ea typeface="맑은 고딕"/>
+                <a:cs typeface="맑은 고딕"/>
               </a:rPr>
               <a:t>실습 안내</a:t>
             </a:r>
@@ -10927,6 +11139,8 @@
                   <a:srgbClr val="FFFFFF"/>
                 </a:solidFill>
                 <a:latin typeface="맑은 고딕"/>
+                <a:ea typeface="맑은 고딕"/>
+                <a:cs typeface="맑은 고딕"/>
               </a:rPr>
               <a:t>Killercoda — 생명주기 실습</a:t>
             </a:r>
@@ -10966,6 +11180,8 @@
                   <a:srgbClr val="0D9488"/>
                 </a:solidFill>
                 <a:latin typeface="맑은 고딕"/>
+                <a:ea typeface="맑은 고딕"/>
+                <a:cs typeface="맑은 고딕"/>
               </a:rPr>
               <a:t>●  </a:t>
             </a:r>
@@ -10975,6 +11191,8 @@
                   <a:srgbClr val="222733"/>
                 </a:solidFill>
                 <a:latin typeface="맑은 고딕"/>
+                <a:ea typeface="맑은 고딕"/>
+                <a:cs typeface="맑은 고딕"/>
               </a:rPr>
               <a:t>docker run -d --name web2 nginx</a:t>
             </a:r>
@@ -10991,6 +11209,8 @@
                   <a:srgbClr val="0D9488"/>
                 </a:solidFill>
                 <a:latin typeface="맑은 고딕"/>
+                <a:ea typeface="맑은 고딕"/>
+                <a:cs typeface="맑은 고딕"/>
               </a:rPr>
               <a:t>●  </a:t>
             </a:r>
@@ -11000,6 +11220,8 @@
                   <a:srgbClr val="222733"/>
                 </a:solidFill>
                 <a:latin typeface="맑은 고딕"/>
+                <a:ea typeface="맑은 고딕"/>
+                <a:cs typeface="맑은 고딕"/>
               </a:rPr>
               <a:t>docker stop web2  →  docker ps -a 로 Exited 상태 확인</a:t>
             </a:r>
@@ -11016,6 +11238,8 @@
                   <a:srgbClr val="0D9488"/>
                 </a:solidFill>
                 <a:latin typeface="맑은 고딕"/>
+                <a:ea typeface="맑은 고딕"/>
+                <a:cs typeface="맑은 고딕"/>
               </a:rPr>
               <a:t>●  </a:t>
             </a:r>
@@ -11025,6 +11249,8 @@
                   <a:srgbClr val="222733"/>
                 </a:solidFill>
                 <a:latin typeface="맑은 고딕"/>
+                <a:ea typeface="맑은 고딕"/>
+                <a:cs typeface="맑은 고딕"/>
               </a:rPr>
               <a:t>docker start web2  →  다시 Up 상태 확인</a:t>
             </a:r>
@@ -11041,6 +11267,8 @@
                   <a:srgbClr val="0D9488"/>
                 </a:solidFill>
                 <a:latin typeface="맑은 고딕"/>
+                <a:ea typeface="맑은 고딕"/>
+                <a:cs typeface="맑은 고딕"/>
               </a:rPr>
               <a:t>●  </a:t>
             </a:r>
@@ -11050,6 +11278,8 @@
                   <a:srgbClr val="222733"/>
                 </a:solidFill>
                 <a:latin typeface="맑은 고딕"/>
+                <a:ea typeface="맑은 고딕"/>
+                <a:cs typeface="맑은 고딕"/>
               </a:rPr>
               <a:t>docker logs web2  /  docker exec -it web2 bash (컨테이너 안 진입, exit로 나오기)</a:t>
             </a:r>
@@ -11085,6 +11315,8 @@
                   <a:srgbClr val="5B6373"/>
                 </a:solidFill>
                 <a:latin typeface="맑은 고딕"/>
+                <a:ea typeface="맑은 고딕"/>
+                <a:cs typeface="맑은 고딕"/>
               </a:rPr>
               <a:t>클라우드인프라관리  ·  2주차 1차시</a:t>
             </a:r>
@@ -11120,6 +11352,8 @@
                   <a:srgbClr val="5B6373"/>
                 </a:solidFill>
                 <a:latin typeface="맑은 고딕"/>
+                <a:ea typeface="맑은 고딕"/>
+                <a:cs typeface="맑은 고딕"/>
               </a:rPr>
               <a:t>09 / 12</a:t>
             </a:r>
